--- a/docs/pptx/Ch6_SUPPLEMENT.pptx
+++ b/docs/pptx/Ch6_SUPPLEMENT.pptx
@@ -503,10 +503,18 @@
           <a:lstStyle/>
           <a:p>
             <a:r>
-              <a:rPr lang="en-US" dirty="0"/>
-              <a:t/>
-            </a:r>
-            <a:endParaRPr lang="en-US" dirty="0"/>
+              <a:t>PROF: Exercice de refactoring — donner du code avec attributs publics.</a:t>
+            </a:r>
+          </a:p>
+          <a:p>
+            <a:r>
+              <a:t>Les étudiants doivent : 1) Passer en private 2) Ajouter getters 3) Ajouter setters avec validation.</a:t>
+            </a:r>
+          </a:p>
+          <a:p>
+            <a:r>
+              <a:t>Durée : 25 min + correction.</a:t>
+            </a:r>
           </a:p>
         </p:txBody>
       </p:sp>
@@ -591,10 +599,18 @@
           <a:lstStyle/>
           <a:p>
             <a:r>
-              <a:rPr lang="en-US" dirty="0"/>
-              <a:t/>
-            </a:r>
-            <a:endParaRPr lang="en-US" dirty="0"/>
+              <a:t>PROF: Questions sur les 4 niveaux de visibilité.</a:t>
+            </a:r>
+          </a:p>
+          <a:p>
+            <a:r>
+              <a:t>Piège classique : protected vs default (package).</a:t>
+            </a:r>
+          </a:p>
+          <a:p>
+            <a:r>
+              <a:t>Faire dessiner un schéma avec 2 packages et 3 classes.</a:t>
+            </a:r>
           </a:p>
         </p:txBody>
       </p:sp>
@@ -679,10 +695,13 @@
           <a:lstStyle/>
           <a:p>
             <a:r>
-              <a:rPr lang="en-US" dirty="0"/>
-              <a:t/>
-            </a:r>
-            <a:endParaRPr lang="en-US" dirty="0"/>
+              <a:t>PROF: Récap — insister sur le lien encapsulation = ADT en pratique.</a:t>
+            </a:r>
+          </a:p>
+          <a:p>
+            <a:r>
+              <a:t>L'interface publique EST la spécification de l'ADT.</a:t>
+            </a:r>
           </a:p>
         </p:txBody>
       </p:sp>
